--- a/dist/초3/국어/발표와쓰기/초3_국어_발표와쓰기_03_마음을전하는편지.pptx
+++ b/dist/초3/국어/발표와쓰기/초3_국어_발표와쓰기_03_마음을전하는편지.pptx
@@ -119,39 +119,39 @@
   <p:extLst>
     <p:ext uri="{521415D9-36F7-43E2-AB2F-B90AF26B5E84}">
       <p14:sectionLst xmlns:p14="http://schemas.microsoft.com/office/powerpoint/2010/main">
-        <p14:section name="도입" id="{dd7d2cfa-155d-ec1f-e248-69c320155e38}">
+        <p14:section name="도입" id="{cd84d03d-d20b-6981-1381-898f206058d1}">
           <p14:sldIdLst>
             <p14:sldId id="256"/>
             <p14:sldId id="257"/>
           </p14:sldIdLst>
         </p14:section>
-        <p14:section name="개념" id="{e3fa7289-086b-a4ec-ab6c-8cd0412bd0fe}">
+        <p14:section name="개념" id="{c5c1deef-b163-41fb-2465-80bc7dde0f38}">
           <p14:sldIdLst>
             <p14:sldId id="258"/>
             <p14:sldId id="259"/>
             <p14:sldId id="260"/>
           </p14:sldIdLst>
         </p14:section>
-        <p14:section name="연습" id="{3944299e-6bd2-4a30-c987-b7b73a103d73}">
+        <p14:section name="연습" id="{9c4930dd-d811-37cb-eb7b-53f1862f9b9c}">
           <p14:sldIdLst>
             <p14:sldId id="261"/>
             <p14:sldId id="262"/>
             <p14:sldId id="263"/>
           </p14:sldIdLst>
         </p14:section>
-        <p14:section name="확인" id="{84613405-0b7b-6758-1751-cc162783db49}">
+        <p14:section name="확인" id="{411de462-e23a-8cf8-1689-e1abbe1bac45}">
           <p14:sldIdLst>
             <p14:sldId id="264"/>
             <p14:sldId id="265"/>
             <p14:sldId id="266"/>
           </p14:sldIdLst>
         </p14:section>
-        <p14:section name="정리" id="{ea807b05-ac5d-db47-31ee-6ac76d013cab}">
+        <p14:section name="정리" id="{b24475a0-06c2-3b0f-c448-4674c2adc8ca}">
           <p14:sldIdLst>
             <p14:sldId id="267"/>
           </p14:sldIdLst>
         </p14:section>
-        <p14:section name="보충" id="{106a965d-c5f3-af5a-a401-c301b2745262}">
+        <p14:section name="보충" id="{e96532b2-8889-81fc-121a-b9b41c63a079}">
           <p14:sldIdLst>
             <p14:sldId id="268"/>
           </p14:sldIdLst>
@@ -2856,7 +2856,7 @@
           <a:bodyPr wrap="square" lIns="0" tIns="0" rIns="0" bIns="0" rtlCol="0" anchor="ctr"/>
           <a:lstStyle/>
           <a:p>
-            <a:pPr algn="l" indent="0" marL="0">
+            <a:pPr eaLnBrk="0" algn="l" indent="0" marL="0">
               <a:buNone/>
             </a:pPr>
             <a:r>
@@ -2897,7 +2897,7 @@
           <a:bodyPr wrap="square" lIns="0" tIns="0" rIns="0" bIns="0" rtlCol="0" anchor="t"/>
           <a:lstStyle/>
           <a:p>
-            <a:pPr indent="0" marL="0">
+            <a:pPr eaLnBrk="0" indent="0" marL="0">
               <a:buNone/>
             </a:pPr>
             <a:r>
@@ -2963,7 +2963,7 @@
           <a:bodyPr wrap="square" lIns="0" tIns="0" rIns="0" bIns="0" rtlCol="0" anchor="ctr"/>
           <a:lstStyle/>
           <a:p>
-            <a:pPr indent="0" marL="0">
+            <a:pPr eaLnBrk="0" indent="0" marL="0">
               <a:spcAft>
                 <a:spcPts val="600"/>
               </a:spcAft>
@@ -2983,7 +2983,7 @@
             <a:endParaRPr lang="ko-KR" sz="3000" dirty="0"/>
           </a:p>
           <a:p>
-            <a:pPr indent="0" marL="0">
+            <a:pPr eaLnBrk="0" indent="0" marL="0">
               <a:spcAft>
                 <a:spcPts val="600"/>
               </a:spcAft>
@@ -3003,7 +3003,7 @@
             <a:endParaRPr lang="ko-KR" sz="3000" dirty="0"/>
           </a:p>
           <a:p>
-            <a:pPr indent="0" marL="0">
+            <a:pPr eaLnBrk="0" indent="0" marL="0">
               <a:spcAft>
                 <a:spcPts val="600"/>
               </a:spcAft>
@@ -3072,7 +3072,7 @@
           <a:bodyPr wrap="square" lIns="0" tIns="0" rIns="0" bIns="0" rtlCol="0" anchor="ctr"/>
           <a:lstStyle/>
           <a:p>
-            <a:pPr algn="l" indent="0" marL="0">
+            <a:pPr eaLnBrk="0" algn="l" indent="0" marL="0">
               <a:buNone/>
             </a:pPr>
             <a:r>
@@ -3138,7 +3138,7 @@
           <a:bodyPr wrap="square" lIns="0" tIns="0" rIns="0" bIns="0" rtlCol="0" anchor="ctr"/>
           <a:lstStyle/>
           <a:p>
-            <a:pPr indent="0" marL="0">
+            <a:pPr eaLnBrk="0" indent="0" marL="0">
               <a:spcAft>
                 <a:spcPts val="600"/>
               </a:spcAft>
@@ -3188,7 +3188,7 @@
           <a:bodyPr wrap="square" lIns="177800" tIns="0" rIns="177800" bIns="0" rtlCol="0" anchor="ctr"/>
           <a:lstStyle/>
           <a:p>
-            <a:pPr algn="l" indent="0" marL="0">
+            <a:pPr eaLnBrk="0" algn="l" indent="0" marL="0">
               <a:buNone/>
             </a:pPr>
             <a:r>
@@ -3227,7 +3227,7 @@
           <a:bodyPr wrap="square" lIns="0" tIns="0" rIns="0" bIns="0" rtlCol="0" anchor="ctr"/>
           <a:lstStyle/>
           <a:p>
-            <a:pPr algn="l" indent="0" marL="0">
+            <a:pPr eaLnBrk="0" algn="l" indent="0" marL="0">
               <a:buNone/>
             </a:pPr>
             <a:r>
@@ -3266,7 +3266,7 @@
           <a:bodyPr wrap="square" lIns="0" tIns="0" rIns="0" bIns="0" rtlCol="0" anchor="ctr"/>
           <a:lstStyle/>
           <a:p>
-            <a:pPr algn="l" indent="0" marL="0">
+            <a:pPr eaLnBrk="0" algn="l" indent="0" marL="0">
               <a:buNone/>
             </a:pPr>
             <a:r>
@@ -3313,7 +3313,7 @@
           <a:bodyPr wrap="square" lIns="177800" tIns="0" rIns="177800" bIns="0" rtlCol="0" anchor="ctr"/>
           <a:lstStyle/>
           <a:p>
-            <a:pPr algn="l" indent="0" marL="0">
+            <a:pPr eaLnBrk="0" algn="l" indent="0" marL="0">
               <a:buNone/>
             </a:pPr>
             <a:r>
@@ -3352,7 +3352,7 @@
           <a:bodyPr wrap="square" lIns="0" tIns="0" rIns="0" bIns="0" rtlCol="0" anchor="ctr"/>
           <a:lstStyle/>
           <a:p>
-            <a:pPr algn="l" indent="0" marL="0">
+            <a:pPr eaLnBrk="0" algn="l" indent="0" marL="0">
               <a:buNone/>
             </a:pPr>
             <a:r>
@@ -3369,7 +3369,7 @@
             <a:endParaRPr lang="ko-KR" sz="3000" dirty="0"/>
           </a:p>
           <a:p>
-            <a:pPr algn="l" indent="0" marL="0">
+            <a:pPr eaLnBrk="0" algn="l" indent="0" marL="0">
               <a:buNone/>
             </a:pPr>
             <a:r>
@@ -3408,7 +3408,7 @@
           <a:bodyPr wrap="square" lIns="0" tIns="0" rIns="0" bIns="0" rtlCol="0" anchor="ctr"/>
           <a:lstStyle/>
           <a:p>
-            <a:pPr algn="l" indent="0" marL="0">
+            <a:pPr eaLnBrk="0" algn="l" indent="0" marL="0">
               <a:buNone/>
             </a:pPr>
             <a:r>
@@ -3425,7 +3425,7 @@
             <a:endParaRPr lang="ko-KR" sz="3000" dirty="0"/>
           </a:p>
           <a:p>
-            <a:pPr algn="l" indent="0" marL="0">
+            <a:pPr eaLnBrk="0" algn="l" indent="0" marL="0">
               <a:buNone/>
             </a:pPr>
             <a:r>
@@ -3464,7 +3464,7 @@
           <a:bodyPr wrap="square" lIns="0" tIns="0" rIns="0" bIns="0" rtlCol="0" anchor="ctr"/>
           <a:lstStyle/>
           <a:p>
-            <a:pPr algn="l" indent="0" marL="0">
+            <a:pPr eaLnBrk="0" algn="l" indent="0" marL="0">
               <a:buNone/>
             </a:pPr>
             <a:r>
@@ -3521,7 +3521,7 @@
             </a:lvl1pPr>
           </a:lstStyle>
           <a:p>
-            <a:pPr algn="r"/>
+            <a:pPr eaLnBrk="0" algn="r"/>
             <a:fld id="{F7021451-1387-4CA6-816F-3879F97B5CBC}" type="slidenum">
               <a:rPr b="0" lang="en-US"/>
               <a:t>10</a:t>
@@ -3578,7 +3578,7 @@
           <a:bodyPr wrap="square" lIns="0" tIns="0" rIns="0" bIns="0" rtlCol="0" anchor="ctr"/>
           <a:lstStyle/>
           <a:p>
-            <a:pPr algn="l" indent="0" marL="0">
+            <a:pPr eaLnBrk="0" algn="l" indent="0" marL="0">
               <a:buNone/>
             </a:pPr>
             <a:r>
@@ -3644,7 +3644,7 @@
           <a:bodyPr wrap="square" lIns="0" tIns="0" rIns="0" bIns="0" rtlCol="0" anchor="ctr"/>
           <a:lstStyle/>
           <a:p>
-            <a:pPr indent="0" marL="0">
+            <a:pPr eaLnBrk="0" indent="0" marL="0">
               <a:spcAft>
                 <a:spcPts val="600"/>
               </a:spcAft>
@@ -3694,7 +3694,7 @@
           <a:bodyPr wrap="square" lIns="0" tIns="0" rIns="0" bIns="0" rtlCol="0" anchor="ctr"/>
           <a:lstStyle/>
           <a:p>
-            <a:pPr algn="ctr" indent="0" marL="0">
+            <a:pPr eaLnBrk="0" algn="ctr" indent="0" marL="0">
               <a:buNone/>
             </a:pPr>
             <a:r>
@@ -3760,7 +3760,7 @@
           <a:bodyPr wrap="square" lIns="0" tIns="0" rIns="0" bIns="0" rtlCol="0" anchor="ctr"/>
           <a:lstStyle/>
           <a:p>
-            <a:pPr indent="0" marL="0">
+            <a:pPr eaLnBrk="0" indent="0" marL="0">
               <a:spcAft>
                 <a:spcPts val="600"/>
               </a:spcAft>
@@ -3810,7 +3810,7 @@
           <a:bodyPr wrap="square" lIns="0" tIns="0" rIns="0" bIns="0" rtlCol="0" anchor="ctr"/>
           <a:lstStyle/>
           <a:p>
-            <a:pPr algn="ctr" indent="0" marL="0">
+            <a:pPr eaLnBrk="0" algn="ctr" indent="0" marL="0">
               <a:buNone/>
             </a:pPr>
             <a:r>
@@ -3876,7 +3876,7 @@
           <a:bodyPr wrap="square" lIns="0" tIns="0" rIns="0" bIns="0" rtlCol="0" anchor="ctr"/>
           <a:lstStyle/>
           <a:p>
-            <a:pPr indent="0" marL="0">
+            <a:pPr eaLnBrk="0" indent="0" marL="0">
               <a:spcAft>
                 <a:spcPts val="600"/>
               </a:spcAft>
@@ -3896,7 +3896,7 @@
             <a:endParaRPr lang="ko-KR" sz="3000" dirty="0"/>
           </a:p>
           <a:p>
-            <a:pPr indent="0" marL="0">
+            <a:pPr eaLnBrk="0" indent="0" marL="0">
               <a:spcAft>
                 <a:spcPts val="600"/>
               </a:spcAft>
@@ -3946,7 +3946,7 @@
           <a:bodyPr wrap="square" lIns="0" tIns="0" rIns="0" bIns="0" rtlCol="0" anchor="ctr"/>
           <a:lstStyle/>
           <a:p>
-            <a:pPr algn="ctr" indent="0" marL="0">
+            <a:pPr eaLnBrk="0" algn="ctr" indent="0" marL="0">
               <a:buNone/>
             </a:pPr>
             <a:r>
@@ -4012,7 +4012,7 @@
           <a:bodyPr wrap="square" lIns="0" tIns="0" rIns="0" bIns="0" rtlCol="0" anchor="ctr"/>
           <a:lstStyle/>
           <a:p>
-            <a:pPr indent="0" marL="0">
+            <a:pPr eaLnBrk="0" indent="0" marL="0">
               <a:spcAft>
                 <a:spcPts val="600"/>
               </a:spcAft>
@@ -4072,7 +4072,7 @@
             </a:lvl1pPr>
           </a:lstStyle>
           <a:p>
-            <a:pPr algn="r"/>
+            <a:pPr eaLnBrk="0" algn="r"/>
             <a:fld id="{F7021451-1387-4CA6-816F-3879F97B5CBC}" type="slidenum">
               <a:rPr b="0" lang="en-US"/>
               <a:t>11</a:t>
@@ -4129,7 +4129,7 @@
           <a:bodyPr wrap="square" lIns="0" tIns="0" rIns="0" bIns="0" rtlCol="0" anchor="ctr"/>
           <a:lstStyle/>
           <a:p>
-            <a:pPr algn="l" indent="0" marL="0">
+            <a:pPr eaLnBrk="0" algn="l" indent="0" marL="0">
               <a:buNone/>
             </a:pPr>
             <a:r>
@@ -4195,7 +4195,7 @@
           <a:bodyPr wrap="square" lIns="0" tIns="0" rIns="0" bIns="0" rtlCol="0" anchor="ctr"/>
           <a:lstStyle/>
           <a:p>
-            <a:pPr indent="0" marL="0">
+            <a:pPr eaLnBrk="0" indent="0" marL="0">
               <a:spcAft>
                 <a:spcPts val="600"/>
               </a:spcAft>
@@ -4215,7 +4215,7 @@
             <a:endParaRPr lang="ko-KR" sz="3000" dirty="0"/>
           </a:p>
           <a:p>
-            <a:pPr indent="0" marL="0">
+            <a:pPr eaLnBrk="0" indent="0" marL="0">
               <a:spcAft>
                 <a:spcPts val="600"/>
               </a:spcAft>
@@ -4265,7 +4265,7 @@
           <a:bodyPr wrap="square" lIns="177800" tIns="0" rIns="177800" bIns="0" rtlCol="0" anchor="ctr"/>
           <a:lstStyle/>
           <a:p>
-            <a:pPr algn="l" indent="0" marL="0">
+            <a:pPr eaLnBrk="0" algn="l" indent="0" marL="0">
               <a:buNone/>
             </a:pPr>
             <a:r>
@@ -4312,7 +4312,7 @@
           <a:bodyPr wrap="square" lIns="177800" tIns="0" rIns="177800" bIns="0" rtlCol="0" anchor="ctr"/>
           <a:lstStyle/>
           <a:p>
-            <a:pPr algn="l" indent="0" marL="0">
+            <a:pPr eaLnBrk="0" algn="l" indent="0" marL="0">
               <a:buNone/>
             </a:pPr>
             <a:r>
@@ -4351,7 +4351,7 @@
           <a:bodyPr wrap="square" lIns="0" tIns="0" rIns="0" bIns="0" rtlCol="0" anchor="t"/>
           <a:lstStyle/>
           <a:p>
-            <a:pPr algn="l" indent="0" marL="0">
+            <a:pPr eaLnBrk="0" algn="l" indent="0" marL="0">
               <a:buNone/>
             </a:pPr>
             <a:r>
@@ -4390,7 +4390,7 @@
           <a:bodyPr wrap="square" lIns="0" tIns="0" rIns="0" bIns="0" rtlCol="0" anchor="ctr"/>
           <a:lstStyle/>
           <a:p>
-            <a:pPr algn="l" indent="0" marL="0">
+            <a:pPr eaLnBrk="0" algn="l" indent="0" marL="0">
               <a:buNone/>
             </a:pPr>
             <a:r>
@@ -4429,7 +4429,7 @@
           <a:bodyPr wrap="square" lIns="0" tIns="0" rIns="0" bIns="0" rtlCol="0" anchor="ctr"/>
           <a:lstStyle/>
           <a:p>
-            <a:pPr algn="l" indent="0" marL="0">
+            <a:pPr eaLnBrk="0" algn="l" indent="0" marL="0">
               <a:buNone/>
             </a:pPr>
             <a:r>
@@ -4468,7 +4468,7 @@
           <a:bodyPr wrap="square" lIns="0" tIns="0" rIns="0" bIns="0" rtlCol="0" anchor="ctr"/>
           <a:lstStyle/>
           <a:p>
-            <a:pPr algn="l" indent="0" marL="0">
+            <a:pPr eaLnBrk="0" algn="l" indent="0" marL="0">
               <a:buNone/>
             </a:pPr>
             <a:r>
@@ -4507,7 +4507,7 @@
           <a:bodyPr wrap="square" lIns="0" tIns="0" rIns="0" bIns="0" rtlCol="0" anchor="ctr"/>
           <a:lstStyle/>
           <a:p>
-            <a:pPr algn="l" indent="0" marL="0">
+            <a:pPr eaLnBrk="0" algn="l" indent="0" marL="0">
               <a:buNone/>
             </a:pPr>
             <a:r>
@@ -4564,7 +4564,7 @@
             </a:lvl1pPr>
           </a:lstStyle>
           <a:p>
-            <a:pPr algn="r"/>
+            <a:pPr eaLnBrk="0" algn="r"/>
             <a:fld id="{F7021451-1387-4CA6-816F-3879F97B5CBC}" type="slidenum">
               <a:rPr b="0" lang="en-US"/>
               <a:t>12</a:t>
@@ -4621,7 +4621,7 @@
           <a:bodyPr wrap="square" lIns="0" tIns="0" rIns="0" bIns="0" rtlCol="0" anchor="ctr"/>
           <a:lstStyle/>
           <a:p>
-            <a:pPr algn="l" indent="0" marL="0">
+            <a:pPr eaLnBrk="0" algn="l" indent="0" marL="0">
               <a:buNone/>
             </a:pPr>
             <a:r>
@@ -4660,7 +4660,7 @@
           <a:bodyPr wrap="square" lIns="0" tIns="0" rIns="0" bIns="0" rtlCol="0" anchor="ctr"/>
           <a:lstStyle/>
           <a:p>
-            <a:pPr algn="l" indent="0" marL="0">
+            <a:pPr eaLnBrk="0" algn="l" indent="0" marL="0">
               <a:buNone/>
             </a:pPr>
             <a:r>
@@ -4726,7 +4726,7 @@
           <a:bodyPr wrap="square" lIns="0" tIns="0" rIns="0" bIns="0" rtlCol="0" anchor="ctr"/>
           <a:lstStyle/>
           <a:p>
-            <a:pPr indent="0" marL="0">
+            <a:pPr eaLnBrk="0" indent="0" marL="0">
               <a:spcAft>
                 <a:spcPts val="600"/>
               </a:spcAft>
@@ -4795,7 +4795,7 @@
           <a:bodyPr wrap="square" lIns="0" tIns="0" rIns="0" bIns="0" rtlCol="0" anchor="ctr"/>
           <a:lstStyle/>
           <a:p>
-            <a:pPr indent="0" marL="0">
+            <a:pPr eaLnBrk="0" indent="0" marL="0">
               <a:spcAft>
                 <a:spcPts val="600"/>
               </a:spcAft>
@@ -4815,7 +4815,7 @@
             <a:endParaRPr lang="ko-KR" sz="3000" dirty="0"/>
           </a:p>
           <a:p>
-            <a:pPr indent="0" marL="0">
+            <a:pPr eaLnBrk="0" indent="0" marL="0">
               <a:spcAft>
                 <a:spcPts val="600"/>
               </a:spcAft>
@@ -4884,7 +4884,7 @@
           <a:bodyPr wrap="square" lIns="0" tIns="0" rIns="0" bIns="0" rtlCol="0" anchor="ctr"/>
           <a:lstStyle/>
           <a:p>
-            <a:pPr indent="0" marL="0">
+            <a:pPr eaLnBrk="0" indent="0" marL="0">
               <a:spcAft>
                 <a:spcPts val="600"/>
               </a:spcAft>
@@ -4904,7 +4904,7 @@
             <a:endParaRPr lang="ko-KR" sz="3000" dirty="0"/>
           </a:p>
           <a:p>
-            <a:pPr indent="0" marL="0">
+            <a:pPr eaLnBrk="0" indent="0" marL="0">
               <a:spcAft>
                 <a:spcPts val="600"/>
               </a:spcAft>
@@ -4973,7 +4973,7 @@
           <a:bodyPr wrap="square" lIns="0" tIns="0" rIns="0" bIns="0" rtlCol="0" anchor="ctr"/>
           <a:lstStyle/>
           <a:p>
-            <a:pPr indent="0" marL="0">
+            <a:pPr eaLnBrk="0" indent="0" marL="0">
               <a:spcAft>
                 <a:spcPts val="600"/>
               </a:spcAft>
@@ -4993,7 +4993,7 @@
             <a:endParaRPr lang="ko-KR" sz="3000" dirty="0"/>
           </a:p>
           <a:p>
-            <a:pPr indent="0" marL="0">
+            <a:pPr eaLnBrk="0" indent="0" marL="0">
               <a:spcAft>
                 <a:spcPts val="600"/>
               </a:spcAft>
@@ -5053,7 +5053,7 @@
             </a:lvl1pPr>
           </a:lstStyle>
           <a:p>
-            <a:pPr algn="r"/>
+            <a:pPr eaLnBrk="0" algn="r"/>
             <a:fld id="{F7021451-1387-4CA6-816F-3879F97B5CBC}" type="slidenum">
               <a:rPr b="0" lang="en-US"/>
               <a:t>13</a:t>
@@ -5110,7 +5110,7 @@
           <a:bodyPr wrap="square" lIns="0" tIns="0" rIns="0" bIns="0" rtlCol="0" anchor="ctr"/>
           <a:lstStyle/>
           <a:p>
-            <a:pPr algn="l" indent="0" marL="0">
+            <a:pPr eaLnBrk="0" algn="l" indent="0" marL="0">
               <a:buNone/>
             </a:pPr>
             <a:r>
@@ -5149,7 +5149,7 @@
           <a:bodyPr wrap="square" lIns="0" tIns="0" rIns="0" bIns="0" rtlCol="0" anchor="ctr"/>
           <a:lstStyle/>
           <a:p>
-            <a:pPr algn="l" indent="0" marL="0">
+            <a:pPr eaLnBrk="0" algn="l" indent="0" marL="0">
               <a:buNone/>
             </a:pPr>
             <a:r>
@@ -5215,7 +5215,7 @@
           <a:bodyPr wrap="square" lIns="0" tIns="0" rIns="0" bIns="0" rtlCol="0" anchor="ctr"/>
           <a:lstStyle/>
           <a:p>
-            <a:pPr indent="0" marL="0">
+            <a:pPr eaLnBrk="0" indent="0" marL="0">
               <a:spcAft>
                 <a:spcPts val="600"/>
               </a:spcAft>
@@ -5265,7 +5265,7 @@
           <a:bodyPr wrap="square" lIns="0" tIns="0" rIns="0" bIns="0" rtlCol="0" anchor="ctr"/>
           <a:lstStyle/>
           <a:p>
-            <a:pPr algn="ctr" indent="0" marL="0">
+            <a:pPr eaLnBrk="0" algn="ctr" indent="0" marL="0">
               <a:buNone/>
             </a:pPr>
             <a:r>
@@ -5304,7 +5304,7 @@
           <a:bodyPr wrap="square" lIns="0" tIns="0" rIns="0" bIns="0" rtlCol="0" anchor="ctr"/>
           <a:lstStyle/>
           <a:p>
-            <a:pPr algn="l" indent="0" marL="0">
+            <a:pPr eaLnBrk="0" algn="l" indent="0" marL="0">
               <a:buNone/>
             </a:pPr>
             <a:r>
@@ -5361,7 +5361,7 @@
             </a:lvl1pPr>
           </a:lstStyle>
           <a:p>
-            <a:pPr algn="r"/>
+            <a:pPr eaLnBrk="0" algn="r"/>
             <a:fld id="{F7021451-1387-4CA6-816F-3879F97B5CBC}" type="slidenum">
               <a:rPr b="0" lang="en-US"/>
               <a:t>2</a:t>
@@ -5418,7 +5418,7 @@
           <a:bodyPr wrap="square" lIns="0" tIns="0" rIns="0" bIns="0" rtlCol="0" anchor="ctr"/>
           <a:lstStyle/>
           <a:p>
-            <a:pPr algn="l" indent="0" marL="0">
+            <a:pPr eaLnBrk="0" algn="l" indent="0" marL="0">
               <a:buNone/>
             </a:pPr>
             <a:r>
@@ -5484,7 +5484,7 @@
           <a:bodyPr wrap="square" lIns="0" tIns="0" rIns="0" bIns="0" rtlCol="0" anchor="t"/>
           <a:lstStyle/>
           <a:p>
-            <a:pPr indent="0" marL="0">
+            <a:pPr eaLnBrk="0" algn="l" indent="0" marL="0">
               <a:lnSpc>
                 <a:spcPct val="105000"/>
               </a:lnSpc>
@@ -5507,7 +5507,7 @@
             <a:endParaRPr lang="ko-KR" sz="3000" dirty="0"/>
           </a:p>
           <a:p>
-            <a:pPr indent="0" marL="0">
+            <a:pPr eaLnBrk="0" algn="l" indent="0" marL="0">
               <a:lnSpc>
                 <a:spcPct val="105000"/>
               </a:lnSpc>
@@ -5530,7 +5530,7 @@
             <a:endParaRPr lang="ko-KR" sz="3000" dirty="0"/>
           </a:p>
           <a:p>
-            <a:pPr indent="0" marL="0">
+            <a:pPr eaLnBrk="0" algn="l" indent="0" marL="0">
               <a:lnSpc>
                 <a:spcPct val="105000"/>
               </a:lnSpc>
@@ -5553,7 +5553,7 @@
             <a:endParaRPr lang="ko-KR" sz="3000" dirty="0"/>
           </a:p>
           <a:p>
-            <a:pPr indent="0" marL="0">
+            <a:pPr eaLnBrk="0" algn="l" indent="0" marL="0">
               <a:lnSpc>
                 <a:spcPct val="105000"/>
               </a:lnSpc>
@@ -5576,7 +5576,7 @@
             <a:endParaRPr lang="ko-KR" sz="3000" dirty="0"/>
           </a:p>
           <a:p>
-            <a:pPr indent="0" marL="0">
+            <a:pPr eaLnBrk="0" algn="l" indent="0" marL="0">
               <a:lnSpc>
                 <a:spcPct val="105000"/>
               </a:lnSpc>
@@ -5599,7 +5599,7 @@
             <a:endParaRPr lang="ko-KR" sz="3000" dirty="0"/>
           </a:p>
           <a:p>
-            <a:pPr indent="0" marL="0">
+            <a:pPr eaLnBrk="0" algn="l" indent="0" marL="0">
               <a:lnSpc>
                 <a:spcPct val="105000"/>
               </a:lnSpc>
@@ -5662,7 +5662,7 @@
             </a:lvl1pPr>
           </a:lstStyle>
           <a:p>
-            <a:pPr algn="r"/>
+            <a:pPr eaLnBrk="0" algn="r"/>
             <a:fld id="{F7021451-1387-4CA6-816F-3879F97B5CBC}" type="slidenum">
               <a:rPr b="0" lang="en-US"/>
               <a:t>3</a:t>
@@ -5719,7 +5719,7 @@
           <a:bodyPr wrap="square" lIns="0" tIns="0" rIns="0" bIns="0" rtlCol="0" anchor="ctr"/>
           <a:lstStyle/>
           <a:p>
-            <a:pPr algn="l" indent="0" marL="0">
+            <a:pPr eaLnBrk="0" algn="l" indent="0" marL="0">
               <a:buNone/>
             </a:pPr>
             <a:r>
@@ -5785,7 +5785,7 @@
           <a:bodyPr wrap="square" lIns="0" tIns="0" rIns="0" bIns="0" rtlCol="0" anchor="ctr"/>
           <a:lstStyle/>
           <a:p>
-            <a:pPr indent="0" marL="0">
+            <a:pPr eaLnBrk="0" indent="0" marL="0">
               <a:spcAft>
                 <a:spcPts val="600"/>
               </a:spcAft>
@@ -5838,7 +5838,7 @@
                     <a:bodyPr/>
                     <a:lstStyle/>
                     <a:p>
-                      <a:pPr algn="ctr" indent="0" marL="0">
+                      <a:pPr eaLnBrk="0" algn="ctr" indent="0" marL="0">
                         <a:buNone/>
                       </a:pPr>
                       <a:r>
@@ -5906,7 +5906,7 @@
                     <a:bodyPr/>
                     <a:lstStyle/>
                     <a:p>
-                      <a:pPr algn="ctr" indent="0" marL="0">
+                      <a:pPr eaLnBrk="0" algn="ctr" indent="0" marL="0">
                         <a:buNone/>
                       </a:pPr>
                       <a:r>
@@ -5976,7 +5976,7 @@
                     <a:bodyPr/>
                     <a:lstStyle/>
                     <a:p>
-                      <a:pPr algn="ctr" indent="0" marL="0">
+                      <a:pPr eaLnBrk="0" algn="ctr" indent="0" marL="0">
                         <a:buNone/>
                       </a:pPr>
                       <a:r>
@@ -6044,7 +6044,7 @@
                     <a:bodyPr/>
                     <a:lstStyle/>
                     <a:p>
-                      <a:pPr algn="ctr" indent="0" marL="0">
+                      <a:pPr eaLnBrk="0" algn="ctr" indent="0" marL="0">
                         <a:buNone/>
                       </a:pPr>
                       <a:r>
@@ -6114,7 +6114,7 @@
                     <a:bodyPr/>
                     <a:lstStyle/>
                     <a:p>
-                      <a:pPr algn="ctr" indent="0" marL="0">
+                      <a:pPr eaLnBrk="0" algn="ctr" indent="0" marL="0">
                         <a:buNone/>
                       </a:pPr>
                       <a:r>
@@ -6182,7 +6182,7 @@
                     <a:bodyPr/>
                     <a:lstStyle/>
                     <a:p>
-                      <a:pPr algn="ctr" indent="0" marL="0">
+                      <a:pPr eaLnBrk="0" algn="ctr" indent="0" marL="0">
                         <a:buNone/>
                       </a:pPr>
                       <a:r>
@@ -6252,7 +6252,7 @@
                     <a:bodyPr/>
                     <a:lstStyle/>
                     <a:p>
-                      <a:pPr algn="ctr" indent="0" marL="0">
+                      <a:pPr eaLnBrk="0" algn="ctr" indent="0" marL="0">
                         <a:buNone/>
                       </a:pPr>
                       <a:r>
@@ -6320,7 +6320,7 @@
                     <a:bodyPr/>
                     <a:lstStyle/>
                     <a:p>
-                      <a:pPr algn="ctr" indent="0" marL="0">
+                      <a:pPr eaLnBrk="0" algn="ctr" indent="0" marL="0">
                         <a:buNone/>
                       </a:pPr>
                       <a:r>
@@ -6390,7 +6390,7 @@
                     <a:bodyPr/>
                     <a:lstStyle/>
                     <a:p>
-                      <a:pPr algn="ctr" indent="0" marL="0">
+                      <a:pPr eaLnBrk="0" algn="ctr" indent="0" marL="0">
                         <a:buNone/>
                       </a:pPr>
                       <a:r>
@@ -6458,7 +6458,7 @@
                     <a:bodyPr/>
                     <a:lstStyle/>
                     <a:p>
-                      <a:pPr algn="ctr" indent="0" marL="0">
+                      <a:pPr eaLnBrk="0" algn="ctr" indent="0" marL="0">
                         <a:buNone/>
                       </a:pPr>
                       <a:r>
@@ -6528,7 +6528,7 @@
                     <a:bodyPr/>
                     <a:lstStyle/>
                     <a:p>
-                      <a:pPr algn="ctr" indent="0" marL="0">
+                      <a:pPr eaLnBrk="0" algn="ctr" indent="0" marL="0">
                         <a:buNone/>
                       </a:pPr>
                       <a:r>
@@ -6596,7 +6596,7 @@
                     <a:bodyPr/>
                     <a:lstStyle/>
                     <a:p>
-                      <a:pPr algn="ctr" indent="0" marL="0">
+                      <a:pPr eaLnBrk="0" algn="ctr" indent="0" marL="0">
                         <a:buNone/>
                       </a:pPr>
                       <a:r>
@@ -6666,7 +6666,7 @@
                     <a:bodyPr/>
                     <a:lstStyle/>
                     <a:p>
-                      <a:pPr algn="ctr" indent="0" marL="0">
+                      <a:pPr eaLnBrk="0" algn="ctr" indent="0" marL="0">
                         <a:buNone/>
                       </a:pPr>
                       <a:r>
@@ -6734,7 +6734,7 @@
                     <a:bodyPr/>
                     <a:lstStyle/>
                     <a:p>
-                      <a:pPr algn="ctr" indent="0" marL="0">
+                      <a:pPr eaLnBrk="0" algn="ctr" indent="0" marL="0">
                         <a:buNone/>
                       </a:pPr>
                       <a:r>
@@ -6841,7 +6841,7 @@
             </a:lvl1pPr>
           </a:lstStyle>
           <a:p>
-            <a:pPr algn="r"/>
+            <a:pPr eaLnBrk="0" algn="r"/>
             <a:fld id="{F7021451-1387-4CA6-816F-3879F97B5CBC}" type="slidenum">
               <a:rPr b="0" lang="en-US"/>
               <a:t>4</a:t>
@@ -6898,7 +6898,7 @@
           <a:bodyPr wrap="square" lIns="0" tIns="0" rIns="0" bIns="0" rtlCol="0" anchor="ctr"/>
           <a:lstStyle/>
           <a:p>
-            <a:pPr algn="l" indent="0" marL="0">
+            <a:pPr eaLnBrk="0" algn="l" indent="0" marL="0">
               <a:buNone/>
             </a:pPr>
             <a:r>
@@ -6964,7 +6964,7 @@
           <a:bodyPr wrap="square" lIns="0" tIns="0" rIns="0" bIns="0" rtlCol="0" anchor="ctr"/>
           <a:lstStyle/>
           <a:p>
-            <a:pPr indent="0" marL="0">
+            <a:pPr eaLnBrk="0" indent="0" marL="0">
               <a:spcAft>
                 <a:spcPts val="600"/>
               </a:spcAft>
@@ -7033,7 +7033,7 @@
           <a:bodyPr wrap="square" lIns="0" tIns="0" rIns="0" bIns="0" rtlCol="0" anchor="ctr"/>
           <a:lstStyle/>
           <a:p>
-            <a:pPr indent="0" marL="0">
+            <a:pPr eaLnBrk="0" indent="0" marL="0">
               <a:spcAft>
                 <a:spcPts val="600"/>
               </a:spcAft>
@@ -7053,7 +7053,7 @@
             <a:endParaRPr lang="ko-KR" sz="3000" dirty="0"/>
           </a:p>
           <a:p>
-            <a:pPr indent="0" marL="0">
+            <a:pPr eaLnBrk="0" indent="0" marL="0">
               <a:spcAft>
                 <a:spcPts val="600"/>
               </a:spcAft>
@@ -7122,7 +7122,7 @@
           <a:bodyPr wrap="square" lIns="0" tIns="0" rIns="0" bIns="0" rtlCol="0" anchor="ctr"/>
           <a:lstStyle/>
           <a:p>
-            <a:pPr indent="0" marL="0">
+            <a:pPr eaLnBrk="0" indent="0" marL="0">
               <a:spcAft>
                 <a:spcPts val="600"/>
               </a:spcAft>
@@ -7142,7 +7142,7 @@
             <a:endParaRPr lang="ko-KR" sz="3000" dirty="0"/>
           </a:p>
           <a:p>
-            <a:pPr indent="0" marL="0">
+            <a:pPr eaLnBrk="0" indent="0" marL="0">
               <a:spcAft>
                 <a:spcPts val="600"/>
               </a:spcAft>
@@ -7211,7 +7211,7 @@
           <a:bodyPr wrap="square" lIns="0" tIns="0" rIns="0" bIns="0" rtlCol="0" anchor="ctr"/>
           <a:lstStyle/>
           <a:p>
-            <a:pPr indent="0" marL="0">
+            <a:pPr eaLnBrk="0" indent="0" marL="0">
               <a:spcAft>
                 <a:spcPts val="600"/>
               </a:spcAft>
@@ -7231,7 +7231,7 @@
             <a:endParaRPr lang="ko-KR" sz="3000" dirty="0"/>
           </a:p>
           <a:p>
-            <a:pPr indent="0" marL="0">
+            <a:pPr eaLnBrk="0" indent="0" marL="0">
               <a:spcAft>
                 <a:spcPts val="600"/>
               </a:spcAft>
@@ -7291,7 +7291,7 @@
             </a:lvl1pPr>
           </a:lstStyle>
           <a:p>
-            <a:pPr algn="r"/>
+            <a:pPr eaLnBrk="0" algn="r"/>
             <a:fld id="{F7021451-1387-4CA6-816F-3879F97B5CBC}" type="slidenum">
               <a:rPr b="0" lang="en-US"/>
               <a:t>5</a:t>
@@ -7348,7 +7348,7 @@
           <a:bodyPr wrap="square" lIns="0" tIns="0" rIns="0" bIns="0" rtlCol="0" anchor="ctr"/>
           <a:lstStyle/>
           <a:p>
-            <a:pPr algn="l" indent="0" marL="0">
+            <a:pPr eaLnBrk="0" algn="l" indent="0" marL="0">
               <a:buNone/>
             </a:pPr>
             <a:r>
@@ -7414,7 +7414,7 @@
           <a:bodyPr wrap="square" lIns="0" tIns="0" rIns="0" bIns="0" rtlCol="0" anchor="ctr"/>
           <a:lstStyle/>
           <a:p>
-            <a:pPr indent="0" marL="0">
+            <a:pPr eaLnBrk="0" indent="0" marL="0">
               <a:spcAft>
                 <a:spcPts val="600"/>
               </a:spcAft>
@@ -7483,7 +7483,7 @@
           <a:bodyPr wrap="square" lIns="0" tIns="0" rIns="0" bIns="0" rtlCol="0" anchor="t"/>
           <a:lstStyle/>
           <a:p>
-            <a:pPr indent="0" marL="0">
+            <a:pPr eaLnBrk="0" algn="l" indent="0" marL="0">
               <a:lnSpc>
                 <a:spcPct val="105000"/>
               </a:lnSpc>
@@ -7506,7 +7506,7 @@
             <a:endParaRPr lang="ko-KR" sz="2400" dirty="0"/>
           </a:p>
           <a:p>
-            <a:pPr indent="0" marL="0">
+            <a:pPr eaLnBrk="0" algn="l" indent="0" marL="0">
               <a:lnSpc>
                 <a:spcPct val="105000"/>
               </a:lnSpc>
@@ -7529,7 +7529,7 @@
             <a:endParaRPr lang="ko-KR" sz="2400" dirty="0"/>
           </a:p>
           <a:p>
-            <a:pPr indent="0" marL="0">
+            <a:pPr eaLnBrk="0" algn="l" indent="0" marL="0">
               <a:lnSpc>
                 <a:spcPct val="105000"/>
               </a:lnSpc>
@@ -7552,7 +7552,7 @@
             <a:endParaRPr lang="ko-KR" sz="2400" dirty="0"/>
           </a:p>
           <a:p>
-            <a:pPr indent="0" marL="0">
+            <a:pPr eaLnBrk="0" algn="l" indent="0" marL="0">
               <a:lnSpc>
                 <a:spcPct val="105000"/>
               </a:lnSpc>
@@ -7575,7 +7575,7 @@
             <a:endParaRPr lang="ko-KR" sz="2400" dirty="0"/>
           </a:p>
           <a:p>
-            <a:pPr indent="0" marL="0">
+            <a:pPr eaLnBrk="0" algn="l" indent="0" marL="0">
               <a:lnSpc>
                 <a:spcPct val="105000"/>
               </a:lnSpc>
@@ -7598,7 +7598,7 @@
             <a:endParaRPr lang="ko-KR" sz="2400" dirty="0"/>
           </a:p>
           <a:p>
-            <a:pPr indent="0" marL="0">
+            <a:pPr eaLnBrk="0" algn="l" indent="0" marL="0">
               <a:lnSpc>
                 <a:spcPct val="105000"/>
               </a:lnSpc>
@@ -7661,7 +7661,7 @@
             </a:lvl1pPr>
           </a:lstStyle>
           <a:p>
-            <a:pPr algn="r"/>
+            <a:pPr eaLnBrk="0" algn="r"/>
             <a:fld id="{F7021451-1387-4CA6-816F-3879F97B5CBC}" type="slidenum">
               <a:rPr b="0" lang="en-US"/>
               <a:t>6</a:t>
@@ -7718,7 +7718,7 @@
           <a:bodyPr wrap="square" lIns="0" tIns="0" rIns="0" bIns="0" rtlCol="0" anchor="ctr"/>
           <a:lstStyle/>
           <a:p>
-            <a:pPr algn="l" indent="0" marL="0">
+            <a:pPr eaLnBrk="0" algn="l" indent="0" marL="0">
               <a:buNone/>
             </a:pPr>
             <a:r>
@@ -7784,7 +7784,7 @@
           <a:bodyPr wrap="square" lIns="0" tIns="0" rIns="0" bIns="0" rtlCol="0" anchor="ctr"/>
           <a:lstStyle/>
           <a:p>
-            <a:pPr indent="0" marL="0">
+            <a:pPr eaLnBrk="0" indent="0" marL="0">
               <a:spcAft>
                 <a:spcPts val="600"/>
               </a:spcAft>
@@ -7853,7 +7853,7 @@
           <a:bodyPr wrap="square" lIns="0" tIns="0" rIns="0" bIns="0" rtlCol="0" anchor="ctr"/>
           <a:lstStyle/>
           <a:p>
-            <a:pPr indent="0" marL="0">
+            <a:pPr eaLnBrk="0" indent="0" marL="0">
               <a:spcAft>
                 <a:spcPts val="600"/>
               </a:spcAft>
@@ -7903,7 +7903,7 @@
           <a:bodyPr wrap="square" lIns="177800" tIns="0" rIns="177800" bIns="0" rtlCol="0" anchor="ctr"/>
           <a:lstStyle/>
           <a:p>
-            <a:pPr algn="l" indent="0" marL="0">
+            <a:pPr eaLnBrk="0" algn="l" indent="0" marL="0">
               <a:buNone/>
             </a:pPr>
             <a:r>
@@ -7942,7 +7942,7 @@
           <a:bodyPr wrap="square" lIns="0" tIns="0" rIns="0" bIns="0" rtlCol="0" anchor="t"/>
           <a:lstStyle/>
           <a:p>
-            <a:pPr algn="l" indent="0" marL="0">
+            <a:pPr eaLnBrk="0" algn="l" indent="0" marL="0">
               <a:buNone/>
             </a:pPr>
             <a:r>
@@ -7959,7 +7959,7 @@
             <a:endParaRPr lang="ko-KR" sz="3000" dirty="0"/>
           </a:p>
           <a:p>
-            <a:pPr algn="l" indent="0" marL="0">
+            <a:pPr eaLnBrk="0" algn="l" indent="0" marL="0">
               <a:buNone/>
             </a:pPr>
             <a:r>
@@ -8006,7 +8006,7 @@
           <a:bodyPr wrap="square" lIns="177800" tIns="0" rIns="177800" bIns="0" rtlCol="0" anchor="ctr"/>
           <a:lstStyle/>
           <a:p>
-            <a:pPr algn="l" indent="0" marL="0">
+            <a:pPr eaLnBrk="0" algn="l" indent="0" marL="0">
               <a:buNone/>
             </a:pPr>
             <a:r>
@@ -8045,7 +8045,7 @@
           <a:bodyPr wrap="square" lIns="0" tIns="0" rIns="0" bIns="0" rtlCol="0" anchor="t"/>
           <a:lstStyle/>
           <a:p>
-            <a:pPr algn="l" indent="0" marL="0">
+            <a:pPr eaLnBrk="0" algn="l" indent="0" marL="0">
               <a:buNone/>
             </a:pPr>
             <a:r>
@@ -8062,7 +8062,7 @@
             <a:endParaRPr lang="ko-KR" sz="3000" dirty="0"/>
           </a:p>
           <a:p>
-            <a:pPr algn="l" indent="0" marL="0">
+            <a:pPr eaLnBrk="0" algn="l" indent="0" marL="0">
               <a:buNone/>
             </a:pPr>
             <a:r>
@@ -8079,7 +8079,7 @@
             <a:endParaRPr lang="ko-KR" sz="3000" dirty="0"/>
           </a:p>
           <a:p>
-            <a:pPr algn="l" indent="0" marL="0">
+            <a:pPr eaLnBrk="0" algn="l" indent="0" marL="0">
               <a:buNone/>
             </a:pPr>
             <a:r>
@@ -8136,7 +8136,7 @@
             </a:lvl1pPr>
           </a:lstStyle>
           <a:p>
-            <a:pPr algn="r"/>
+            <a:pPr eaLnBrk="0" algn="r"/>
             <a:fld id="{F7021451-1387-4CA6-816F-3879F97B5CBC}" type="slidenum">
               <a:rPr b="0" lang="en-US"/>
               <a:t>7</a:t>
@@ -8193,7 +8193,7 @@
           <a:bodyPr wrap="square" lIns="0" tIns="0" rIns="0" bIns="0" rtlCol="0" anchor="ctr"/>
           <a:lstStyle/>
           <a:p>
-            <a:pPr algn="l" indent="0" marL="0">
+            <a:pPr eaLnBrk="0" algn="l" indent="0" marL="0">
               <a:buNone/>
             </a:pPr>
             <a:r>
@@ -8232,7 +8232,7 @@
           <a:bodyPr wrap="square" lIns="0" tIns="0" rIns="0" bIns="0" rtlCol="0" anchor="ctr"/>
           <a:lstStyle/>
           <a:p>
-            <a:pPr algn="l" indent="0" marL="0">
+            <a:pPr eaLnBrk="0" algn="l" indent="0" marL="0">
               <a:buNone/>
             </a:pPr>
             <a:r>
@@ -8298,7 +8298,7 @@
           <a:bodyPr wrap="square" lIns="0" tIns="0" rIns="0" bIns="0" rtlCol="0" anchor="ctr"/>
           <a:lstStyle/>
           <a:p>
-            <a:pPr indent="0" marL="0">
+            <a:pPr eaLnBrk="0" indent="0" marL="0">
               <a:spcAft>
                 <a:spcPts val="600"/>
               </a:spcAft>
@@ -8348,7 +8348,7 @@
           <a:bodyPr wrap="square" lIns="0" tIns="0" rIns="0" bIns="0" rtlCol="0" anchor="ctr"/>
           <a:lstStyle/>
           <a:p>
-            <a:pPr algn="ctr" indent="0" marL="0">
+            <a:pPr eaLnBrk="0" algn="ctr" indent="0" marL="0">
               <a:buNone/>
             </a:pPr>
             <a:r>
@@ -8387,7 +8387,7 @@
           <a:bodyPr wrap="square" lIns="0" tIns="0" rIns="0" bIns="0" rtlCol="0" anchor="ctr"/>
           <a:lstStyle/>
           <a:p>
-            <a:pPr algn="l" indent="0" marL="0">
+            <a:pPr eaLnBrk="0" algn="l" indent="0" marL="0">
               <a:buNone/>
             </a:pPr>
             <a:r>
@@ -8434,7 +8434,7 @@
           <a:bodyPr wrap="square" lIns="0" tIns="0" rIns="0" bIns="0" rtlCol="0" anchor="ctr"/>
           <a:lstStyle/>
           <a:p>
-            <a:pPr algn="ctr" indent="0" marL="0">
+            <a:pPr eaLnBrk="0" algn="ctr" indent="0" marL="0">
               <a:buNone/>
             </a:pPr>
             <a:r>
@@ -8473,7 +8473,7 @@
           <a:bodyPr wrap="square" lIns="0" tIns="0" rIns="0" bIns="0" rtlCol="0" anchor="ctr"/>
           <a:lstStyle/>
           <a:p>
-            <a:pPr algn="l" indent="0" marL="0">
+            <a:pPr eaLnBrk="0" algn="l" indent="0" marL="0">
               <a:buNone/>
             </a:pPr>
             <a:r>
@@ -8520,7 +8520,7 @@
           <a:bodyPr wrap="square" lIns="0" tIns="0" rIns="0" bIns="0" rtlCol="0" anchor="ctr"/>
           <a:lstStyle/>
           <a:p>
-            <a:pPr algn="ctr" indent="0" marL="0">
+            <a:pPr eaLnBrk="0" algn="ctr" indent="0" marL="0">
               <a:buNone/>
             </a:pPr>
             <a:r>
@@ -8559,7 +8559,7 @@
           <a:bodyPr wrap="square" lIns="0" tIns="0" rIns="0" bIns="0" rtlCol="0" anchor="ctr"/>
           <a:lstStyle/>
           <a:p>
-            <a:pPr algn="l" indent="0" marL="0">
+            <a:pPr eaLnBrk="0" algn="l" indent="0" marL="0">
               <a:buNone/>
             </a:pPr>
             <a:r>
@@ -8616,7 +8616,7 @@
             </a:lvl1pPr>
           </a:lstStyle>
           <a:p>
-            <a:pPr algn="r"/>
+            <a:pPr eaLnBrk="0" algn="r"/>
             <a:fld id="{F7021451-1387-4CA6-816F-3879F97B5CBC}" type="slidenum">
               <a:rPr b="0" lang="en-US"/>
               <a:t>8</a:t>
@@ -8673,7 +8673,7 @@
           <a:bodyPr wrap="square" lIns="0" tIns="0" rIns="0" bIns="0" rtlCol="0" anchor="ctr"/>
           <a:lstStyle/>
           <a:p>
-            <a:pPr algn="l" indent="0" marL="0">
+            <a:pPr eaLnBrk="0" algn="l" indent="0" marL="0">
               <a:buNone/>
             </a:pPr>
             <a:r>
@@ -8739,7 +8739,7 @@
           <a:bodyPr wrap="square" lIns="0" tIns="0" rIns="0" bIns="0" rtlCol="0" anchor="ctr"/>
           <a:lstStyle/>
           <a:p>
-            <a:pPr indent="0" marL="0">
+            <a:pPr eaLnBrk="0" indent="0" marL="0">
               <a:spcAft>
                 <a:spcPts val="600"/>
               </a:spcAft>
@@ -8759,7 +8759,7 @@
             <a:endParaRPr lang="ko-KR" sz="3000" dirty="0"/>
           </a:p>
           <a:p>
-            <a:pPr indent="0" marL="0">
+            <a:pPr eaLnBrk="0" indent="0" marL="0">
               <a:spcAft>
                 <a:spcPts val="600"/>
               </a:spcAft>
@@ -8779,7 +8779,7 @@
             <a:endParaRPr lang="ko-KR" sz="3000" dirty="0"/>
           </a:p>
           <a:p>
-            <a:pPr indent="0" marL="0">
+            <a:pPr eaLnBrk="0" indent="0" marL="0">
               <a:spcAft>
                 <a:spcPts val="600"/>
               </a:spcAft>
@@ -8799,7 +8799,7 @@
             <a:endParaRPr lang="ko-KR" sz="3000" dirty="0"/>
           </a:p>
           <a:p>
-            <a:pPr indent="0" marL="0">
+            <a:pPr eaLnBrk="0" indent="0" marL="0">
               <a:spcAft>
                 <a:spcPts val="600"/>
               </a:spcAft>
@@ -8819,7 +8819,7 @@
             <a:endParaRPr lang="ko-KR" sz="3000" dirty="0"/>
           </a:p>
           <a:p>
-            <a:pPr indent="0" marL="0">
+            <a:pPr eaLnBrk="0" indent="0" marL="0">
               <a:spcAft>
                 <a:spcPts val="600"/>
               </a:spcAft>
@@ -8867,7 +8867,7 @@
           <a:bodyPr wrap="square" lIns="0" tIns="0" rIns="0" bIns="0" rtlCol="0" anchor="ctr"/>
           <a:lstStyle/>
           <a:p>
-            <a:pPr algn="ctr" indent="0" marL="0">
+            <a:pPr eaLnBrk="0" algn="ctr" indent="0" marL="0">
               <a:buNone/>
             </a:pPr>
             <a:r>
@@ -8906,7 +8906,7 @@
           <a:bodyPr wrap="square" lIns="0" tIns="0" rIns="0" bIns="0" rtlCol="0" anchor="t"/>
           <a:lstStyle/>
           <a:p>
-            <a:pPr algn="l" indent="0" marL="0">
+            <a:pPr eaLnBrk="0" algn="l" indent="0" marL="0">
               <a:buNone/>
             </a:pPr>
             <a:r>
@@ -8951,7 +8951,7 @@
           <a:bodyPr wrap="square" lIns="0" tIns="0" rIns="0" bIns="0" rtlCol="0" anchor="ctr"/>
           <a:lstStyle/>
           <a:p>
-            <a:pPr algn="ctr" indent="0" marL="0">
+            <a:pPr eaLnBrk="0" algn="ctr" indent="0" marL="0">
               <a:buNone/>
             </a:pPr>
             <a:r>
@@ -8990,7 +8990,7 @@
           <a:bodyPr wrap="square" lIns="0" tIns="0" rIns="0" bIns="0" rtlCol="0" anchor="t"/>
           <a:lstStyle/>
           <a:p>
-            <a:pPr algn="l" indent="0" marL="0">
+            <a:pPr eaLnBrk="0" algn="l" indent="0" marL="0">
               <a:buNone/>
             </a:pPr>
             <a:r>
@@ -9035,7 +9035,7 @@
           <a:bodyPr wrap="square" lIns="0" tIns="0" rIns="0" bIns="0" rtlCol="0" anchor="ctr"/>
           <a:lstStyle/>
           <a:p>
-            <a:pPr algn="ctr" indent="0" marL="0">
+            <a:pPr eaLnBrk="0" algn="ctr" indent="0" marL="0">
               <a:buNone/>
             </a:pPr>
             <a:r>
@@ -9074,7 +9074,7 @@
           <a:bodyPr wrap="square" lIns="0" tIns="0" rIns="0" bIns="0" rtlCol="0" anchor="t"/>
           <a:lstStyle/>
           <a:p>
-            <a:pPr algn="l" indent="0" marL="0">
+            <a:pPr eaLnBrk="0" algn="l" indent="0" marL="0">
               <a:buNone/>
             </a:pPr>
             <a:r>
@@ -9119,7 +9119,7 @@
           <a:bodyPr wrap="square" lIns="0" tIns="0" rIns="0" bIns="0" rtlCol="0" anchor="ctr"/>
           <a:lstStyle/>
           <a:p>
-            <a:pPr algn="ctr" indent="0" marL="0">
+            <a:pPr eaLnBrk="0" algn="ctr" indent="0" marL="0">
               <a:buNone/>
             </a:pPr>
             <a:r>
@@ -9158,7 +9158,7 @@
           <a:bodyPr wrap="square" lIns="0" tIns="0" rIns="0" bIns="0" rtlCol="0" anchor="t"/>
           <a:lstStyle/>
           <a:p>
-            <a:pPr algn="l" indent="0" marL="0">
+            <a:pPr eaLnBrk="0" algn="l" indent="0" marL="0">
               <a:buNone/>
             </a:pPr>
             <a:r>
@@ -9215,7 +9215,7 @@
             </a:lvl1pPr>
           </a:lstStyle>
           <a:p>
-            <a:pPr algn="r"/>
+            <a:pPr eaLnBrk="0" algn="r"/>
             <a:fld id="{F7021451-1387-4CA6-816F-3879F97B5CBC}" type="slidenum">
               <a:rPr b="0" lang="en-US"/>
               <a:t>9</a:t>

--- a/dist/초3/국어/발표와쓰기/초3_국어_발표와쓰기_03_마음을전하는편지.pptx
+++ b/dist/초3/국어/발표와쓰기/초3_국어_발표와쓰기_03_마음을전하는편지.pptx
@@ -119,39 +119,39 @@
   <p:extLst>
     <p:ext uri="{521415D9-36F7-43E2-AB2F-B90AF26B5E84}">
       <p14:sectionLst xmlns:p14="http://schemas.microsoft.com/office/powerpoint/2010/main">
-        <p14:section name="도입" id="{cd84d03d-d20b-6981-1381-898f206058d1}">
+        <p14:section name="도입" id="{d31d8b80-933d-ea3e-7224-43ca85f14fba}">
           <p14:sldIdLst>
             <p14:sldId id="256"/>
             <p14:sldId id="257"/>
           </p14:sldIdLst>
         </p14:section>
-        <p14:section name="개념" id="{c5c1deef-b163-41fb-2465-80bc7dde0f38}">
+        <p14:section name="개념" id="{4ef18cb1-77bb-eb2c-321d-5183e2018ef2}">
           <p14:sldIdLst>
             <p14:sldId id="258"/>
             <p14:sldId id="259"/>
             <p14:sldId id="260"/>
           </p14:sldIdLst>
         </p14:section>
-        <p14:section name="연습" id="{9c4930dd-d811-37cb-eb7b-53f1862f9b9c}">
+        <p14:section name="연습" id="{ac98b0c6-16b2-363b-647b-ef2abff8a7da}">
           <p14:sldIdLst>
             <p14:sldId id="261"/>
             <p14:sldId id="262"/>
             <p14:sldId id="263"/>
           </p14:sldIdLst>
         </p14:section>
-        <p14:section name="확인" id="{411de462-e23a-8cf8-1689-e1abbe1bac45}">
+        <p14:section name="확인" id="{a7fab2ab-c21f-16b8-9015-3ca5ccd23c31}">
           <p14:sldIdLst>
             <p14:sldId id="264"/>
             <p14:sldId id="265"/>
             <p14:sldId id="266"/>
           </p14:sldIdLst>
         </p14:section>
-        <p14:section name="정리" id="{b24475a0-06c2-3b0f-c448-4674c2adc8ca}">
+        <p14:section name="정리" id="{2a402649-e091-cdf3-f52e-94e906721346}">
           <p14:sldIdLst>
             <p14:sldId id="267"/>
           </p14:sldIdLst>
         </p14:section>
-        <p14:section name="보충" id="{e96532b2-8889-81fc-121a-b9b41c63a079}">
+        <p14:section name="보충" id="{2ebc839a-45e8-c828-c48f-64b07412f22b}">
           <p14:sldIdLst>
             <p14:sldId id="268"/>
           </p14:sldIdLst>
@@ -5821,7 +5821,7 @@
           </p:nvPr>
         </p:nvGraphicFramePr>
         <p:xfrm>
-          <a:off x="1293876" y="1516380"/>
+          <a:off x="1293876" y="1569720"/>
           <a:ext cx="9601200" cy="914400"/>
         </p:xfrm>
         <a:graphic>
@@ -5832,7 +5832,7 @@
                 <a:gridCol w="3648456"/>
                 <a:gridCol w="5952744"/>
               </a:tblGrid>
-              <a:tr h="487680">
+              <a:tr h="472440">
                 <a:tc>
                   <a:txBody>
                     <a:bodyPr/>
@@ -5970,7 +5970,7 @@
                   </a:tcPr>
                 </a:tc>
               </a:tr>
-              <a:tr h="487680">
+              <a:tr h="472440">
                 <a:tc>
                   <a:txBody>
                     <a:bodyPr/>
@@ -6108,7 +6108,7 @@
                   </a:tcPr>
                 </a:tc>
               </a:tr>
-              <a:tr h="487680">
+              <a:tr h="472440">
                 <a:tc>
                   <a:txBody>
                     <a:bodyPr/>
@@ -6246,7 +6246,7 @@
                   </a:tcPr>
                 </a:tc>
               </a:tr>
-              <a:tr h="487680">
+              <a:tr h="472440">
                 <a:tc>
                   <a:txBody>
                     <a:bodyPr/>
@@ -6384,7 +6384,7 @@
                   </a:tcPr>
                 </a:tc>
               </a:tr>
-              <a:tr h="487680">
+              <a:tr h="472440">
                 <a:tc>
                   <a:txBody>
                     <a:bodyPr/>
@@ -6522,7 +6522,7 @@
                   </a:tcPr>
                 </a:tc>
               </a:tr>
-              <a:tr h="487680">
+              <a:tr h="472440">
                 <a:tc>
                   <a:txBody>
                     <a:bodyPr/>
@@ -6660,7 +6660,7 @@
                   </a:tcPr>
                 </a:tc>
               </a:tr>
-              <a:tr h="487680">
+              <a:tr h="472440">
                 <a:tc>
                   <a:txBody>
                     <a:bodyPr/>
